--- a/public/retrieval-two-things-template.pptx
+++ b/public/retrieval-two-things-template.pptx
@@ -2,13 +2,13 @@
 <file path=ppt/presentation.xml><?xml version="1.0" encoding="utf-8"?>
 <p:presentation xmlns:p="http://schemas.openxmlformats.org/presentationml/2006/main">
   <p:sldMasterIdLst>
-    <p:sldMasterId xmlns:r="http://schemas.openxmlformats.org/officeDocument/2006/relationships" id="2147483648" r:id="Rbd3bb3fac3cf4096"/>
+    <p:sldMasterId xmlns:r="http://schemas.openxmlformats.org/officeDocument/2006/relationships" id="2147483648" r:id="R3438a832a1b64416"/>
   </p:sldMasterIdLst>
   <p:notesMasterIdLst>
-    <p:notesMasterId xmlns:r="http://schemas.openxmlformats.org/officeDocument/2006/relationships" r:id="R49c0ca1f444d49f1"/>
+    <p:notesMasterId xmlns:r="http://schemas.openxmlformats.org/officeDocument/2006/relationships" r:id="R901bfbae74424921"/>
   </p:notesMasterIdLst>
   <p:sldIdLst>
-    <p:sldId xmlns:r="http://schemas.openxmlformats.org/officeDocument/2006/relationships" id="256" r:id="Re032fc48c4594807"/>
+    <p:sldId xmlns:r="http://schemas.openxmlformats.org/officeDocument/2006/relationships" id="256" r:id="R8e988988da07449a"/>
   </p:sldIdLst>
   <p:sldSz cx="12192000" cy="6858000"/>
   <p:notesSz cx="6858000" cy="9144000"/>
@@ -442,7 +442,7 @@
           <a:lstStyle xmlns:a="http://schemas.openxmlformats.org/drawingml/2006/main"/>
           <a:p xmlns:a="http://schemas.openxmlformats.org/drawingml/2006/main">
             <a:r>
-              <a:t>Teacher setup: Replace bracketed text before teaching. Every text box is editable. Duplicate the slide for checked answers or a second prompt. Keep prompt and answer sides separate when printing cards.</a:t>
+              <a:t>Teacher setup: Replace bracketed text before teaching. All text and shapes are editable. Duplicate the slide for answers or another prompt. For card activities, separate prompt and answer sides before printing.</a:t>
             </a:r>
           </a:p>
           <a:p xmlns:a="http://schemas.openxmlformats.org/drawingml/2006/main">
@@ -452,17 +452,12 @@
           </a:p>
           <a:p xmlns:a="http://schemas.openxmlformats.org/drawingml/2006/main">
             <a:r>
-              <a:t>Activity: Two things</a:t>
-            </a:r>
-          </a:p>
-          <a:p xmlns:a="http://schemas.openxmlformats.org/drawingml/2006/main">
-            <a:r>
               <a:t>Materials: Paper or mini whiteboards</a:t>
             </a:r>
           </a:p>
           <a:p xmlns:a="http://schemas.openxmlformats.org/drawingml/2006/main">
             <a:r>
-              <a:t>Suggested total time including feedback: 3 minutes.</a:t>
+              <a:t>Suggested time including feedback: 3 minutes.</a:t>
             </a:r>
           </a:p>
           <a:p xmlns:a="http://schemas.openxmlformats.org/drawingml/2006/main">
@@ -505,26 +500,6 @@
               <a:t>Adapt: Ask for two steps, two examples or two connections; give additional thinking time where needed.</a:t>
             </a:r>
           </a:p>
-          <a:p xmlns:a="http://schemas.openxmlformats.org/drawingml/2006/main">
-            <a:r>
-              <a:t>Credit: Pooja K. Agarwal — named classroom strategy</a:t>
-            </a:r>
-          </a:p>
-          <a:p xmlns:a="http://schemas.openxmlformats.org/drawingml/2006/main">
-            <a:r>
-              <a:t>Agarwal shares this strategy as “Two Things”. This guide adds a teacher check and a later revisit.</a:t>
-            </a:r>
-          </a:p>
-          <a:p xmlns:a="http://schemas.openxmlformats.org/drawingml/2006/main">
-            <a:r>
-              <a:t>Source: https://www.retrievalpractice.org/strategies/2018/two-things</a:t>
-            </a:r>
-          </a:p>
-          <a:p xmlns:a="http://schemas.openxmlformats.org/drawingml/2006/main">
-            <a:r>
-              <a:t>Full guide: https://tnt-teaching-tools.github.io/cold-call-classroom/retrieval-two-things.html</a:t>
-            </a:r>
-          </a:p>
         </p:txBody>
       </p:sp>
       <p:sp>
@@ -569,7 +544,7 @@
           <p:cNvPr id="4" name="Accent rule">
             <a:extLst xmlns:a="http://schemas.openxmlformats.org/drawingml/2006/main">
               <a:ext uri="{FF2B5EF4-FFF2-40B4-BE49-F238E27FC236}">
-                <a16:creationId xmlns:a16="http://schemas.microsoft.com/office/drawing/2014/main" id="{4FCDC0EB-943C-4FD5-A4E8-97D545389E9A}"/>
+                <a16:creationId xmlns:a16="http://schemas.microsoft.com/office/drawing/2014/main" id="{91A4664C-AC03-4400-BEE0-1CDA17CC70AA}"/>
               </a:ext>
             </a:extLst>
           </p:cNvPr>
@@ -600,7 +575,7 @@
           <p:cNvPr id="2" name="Title">
             <a:extLst xmlns:a="http://schemas.openxmlformats.org/drawingml/2006/main">
               <a:ext uri="{FF2B5EF4-FFF2-40B4-BE49-F238E27FC236}">
-                <a16:creationId xmlns:a16="http://schemas.microsoft.com/office/drawing/2014/main" id="{247346C3-7E05-47F3-A1AC-0BFC7E930CB6}"/>
+                <a16:creationId xmlns:a16="http://schemas.microsoft.com/office/drawing/2014/main" id="{44224EAA-0434-460C-BFE5-43EE1EBF2818}"/>
               </a:ext>
             </a:extLst>
           </p:cNvPr>
@@ -747,7 +722,7 @@
           <p:cNvPr id="3" name="Subtitle">
             <a:extLst xmlns:a="http://schemas.openxmlformats.org/drawingml/2006/main">
               <a:ext uri="{FF2B5EF4-FFF2-40B4-BE49-F238E27FC236}">
-                <a16:creationId xmlns:a16="http://schemas.microsoft.com/office/drawing/2014/main" id="{BFEC6C69-8ED9-48F4-916E-F5B7F2E502FC}"/>
+                <a16:creationId xmlns:a16="http://schemas.microsoft.com/office/drawing/2014/main" id="{2F9CF71E-D6CE-4BC5-AF49-E8206A3CFEDB}"/>
               </a:ext>
             </a:extLst>
           </p:cNvPr>
@@ -911,7 +886,7 @@
           <p:cNvPr id="3" name="Accent rule">
             <a:extLst xmlns:a="http://schemas.openxmlformats.org/drawingml/2006/main">
               <a:ext uri="{FF2B5EF4-FFF2-40B4-BE49-F238E27FC236}">
-                <a16:creationId xmlns:a16="http://schemas.microsoft.com/office/drawing/2014/main" id="{1F939668-09BD-469B-A5F0-11C936F2B4A7}"/>
+                <a16:creationId xmlns:a16="http://schemas.microsoft.com/office/drawing/2014/main" id="{E1FABF70-FC78-4835-ABE5-3F131A673DB8}"/>
               </a:ext>
             </a:extLst>
           </p:cNvPr>
@@ -942,7 +917,7 @@
           <p:cNvPr id="2" name="Section title">
             <a:extLst xmlns:a="http://schemas.openxmlformats.org/drawingml/2006/main">
               <a:ext uri="{FF2B5EF4-FFF2-40B4-BE49-F238E27FC236}">
-                <a16:creationId xmlns:a16="http://schemas.microsoft.com/office/drawing/2014/main" id="{9753440E-B457-42AA-BB77-E7B9C9BA6DD1}"/>
+                <a16:creationId xmlns:a16="http://schemas.microsoft.com/office/drawing/2014/main" id="{036B5810-DDD1-474E-BAD0-02CA84FA9C23}"/>
               </a:ext>
             </a:extLst>
           </p:cNvPr>
@@ -1106,7 +1081,7 @@
           <p:cNvPr id="4" name="Accent rule">
             <a:extLst xmlns:a="http://schemas.openxmlformats.org/drawingml/2006/main">
               <a:ext uri="{FF2B5EF4-FFF2-40B4-BE49-F238E27FC236}">
-                <a16:creationId xmlns:a16="http://schemas.microsoft.com/office/drawing/2014/main" id="{1EFC43C7-C3CE-43D8-B01C-993630924728}"/>
+                <a16:creationId xmlns:a16="http://schemas.microsoft.com/office/drawing/2014/main" id="{8F3D2C62-1D4A-4C45-9990-8C4747E560F6}"/>
               </a:ext>
             </a:extLst>
           </p:cNvPr>
@@ -1137,7 +1112,7 @@
           <p:cNvPr id="2" name="Title">
             <a:extLst xmlns:a="http://schemas.openxmlformats.org/drawingml/2006/main">
               <a:ext uri="{FF2B5EF4-FFF2-40B4-BE49-F238E27FC236}">
-                <a16:creationId xmlns:a16="http://schemas.microsoft.com/office/drawing/2014/main" id="{C6233A59-0419-44F1-9E58-B3E1E7EC0E54}"/>
+                <a16:creationId xmlns:a16="http://schemas.microsoft.com/office/drawing/2014/main" id="{344D46AC-FAEF-4C07-92ED-2ED7432C3CED}"/>
               </a:ext>
             </a:extLst>
           </p:cNvPr>
@@ -1284,7 +1259,7 @@
           <p:cNvPr id="3" name="Body">
             <a:extLst xmlns:a="http://schemas.openxmlformats.org/drawingml/2006/main">
               <a:ext uri="{FF2B5EF4-FFF2-40B4-BE49-F238E27FC236}">
-                <a16:creationId xmlns:a16="http://schemas.microsoft.com/office/drawing/2014/main" id="{8A08455E-A4A8-4C4D-B2A2-B4D9F9882A24}"/>
+                <a16:creationId xmlns:a16="http://schemas.microsoft.com/office/drawing/2014/main" id="{4AFDB650-D17A-428E-8CBA-1512A4662C01}"/>
               </a:ext>
             </a:extLst>
           </p:cNvPr>
@@ -1448,7 +1423,7 @@
           <p:cNvPr id="5" name="Accent rule">
             <a:extLst xmlns:a="http://schemas.openxmlformats.org/drawingml/2006/main">
               <a:ext uri="{FF2B5EF4-FFF2-40B4-BE49-F238E27FC236}">
-                <a16:creationId xmlns:a16="http://schemas.microsoft.com/office/drawing/2014/main" id="{44C10D2A-A6FE-43DA-98AF-A8053A6FA4DE}"/>
+                <a16:creationId xmlns:a16="http://schemas.microsoft.com/office/drawing/2014/main" id="{C904D5F2-B0AC-462C-B4C2-C2850256DAE5}"/>
               </a:ext>
             </a:extLst>
           </p:cNvPr>
@@ -1479,7 +1454,7 @@
           <p:cNvPr id="2" name="Title">
             <a:extLst xmlns:a="http://schemas.openxmlformats.org/drawingml/2006/main">
               <a:ext uri="{FF2B5EF4-FFF2-40B4-BE49-F238E27FC236}">
-                <a16:creationId xmlns:a16="http://schemas.microsoft.com/office/drawing/2014/main" id="{90B6FDF9-300B-43A6-A6E0-D454DF76A042}"/>
+                <a16:creationId xmlns:a16="http://schemas.microsoft.com/office/drawing/2014/main" id="{3464F1F1-0C4D-403A-88FA-313694BF96D1}"/>
               </a:ext>
             </a:extLst>
           </p:cNvPr>
@@ -1626,7 +1601,7 @@
           <p:cNvPr id="3" name="Left column">
             <a:extLst xmlns:a="http://schemas.openxmlformats.org/drawingml/2006/main">
               <a:ext uri="{FF2B5EF4-FFF2-40B4-BE49-F238E27FC236}">
-                <a16:creationId xmlns:a16="http://schemas.microsoft.com/office/drawing/2014/main" id="{4481211F-B77B-4A38-8E1C-70E420F68770}"/>
+                <a16:creationId xmlns:a16="http://schemas.microsoft.com/office/drawing/2014/main" id="{FF80B271-6144-41B4-9C81-0349A06E7DAD}"/>
               </a:ext>
             </a:extLst>
           </p:cNvPr>
@@ -1773,7 +1748,7 @@
           <p:cNvPr id="4" name="Right column">
             <a:extLst xmlns:a="http://schemas.openxmlformats.org/drawingml/2006/main">
               <a:ext uri="{FF2B5EF4-FFF2-40B4-BE49-F238E27FC236}">
-                <a16:creationId xmlns:a16="http://schemas.microsoft.com/office/drawing/2014/main" id="{3A135ABC-4958-42C8-B4B4-864287E1A0FC}"/>
+                <a16:creationId xmlns:a16="http://schemas.microsoft.com/office/drawing/2014/main" id="{1C862F81-BE2F-4775-8D2E-C925E2E33444}"/>
               </a:ext>
             </a:extLst>
           </p:cNvPr>
@@ -1937,7 +1912,7 @@
           <p:cNvPr id="4" name="Accent rule">
             <a:extLst xmlns:a="http://schemas.openxmlformats.org/drawingml/2006/main">
               <a:ext uri="{FF2B5EF4-FFF2-40B4-BE49-F238E27FC236}">
-                <a16:creationId xmlns:a16="http://schemas.microsoft.com/office/drawing/2014/main" id="{5544F2FF-58AE-4202-8263-1387E8BF8349}"/>
+                <a16:creationId xmlns:a16="http://schemas.microsoft.com/office/drawing/2014/main" id="{A224CE89-BEAD-4664-9B92-DD17B9EB41BD}"/>
               </a:ext>
             </a:extLst>
           </p:cNvPr>
@@ -1968,7 +1943,7 @@
           <p:cNvPr id="2" name="Title">
             <a:extLst xmlns:a="http://schemas.openxmlformats.org/drawingml/2006/main">
               <a:ext uri="{FF2B5EF4-FFF2-40B4-BE49-F238E27FC236}">
-                <a16:creationId xmlns:a16="http://schemas.microsoft.com/office/drawing/2014/main" id="{1C1A8F3F-5E23-47FF-A5A1-9C8DF81A133B}"/>
+                <a16:creationId xmlns:a16="http://schemas.microsoft.com/office/drawing/2014/main" id="{4A008C26-0A66-46DC-969A-D3A948F7DAC0}"/>
               </a:ext>
             </a:extLst>
           </p:cNvPr>
@@ -2115,7 +2090,7 @@
           <p:cNvPr id="3" name="Left column">
             <a:extLst xmlns:a="http://schemas.openxmlformats.org/drawingml/2006/main">
               <a:ext uri="{FF2B5EF4-FFF2-40B4-BE49-F238E27FC236}">
-                <a16:creationId xmlns:a16="http://schemas.microsoft.com/office/drawing/2014/main" id="{A3707CD6-45B1-44A8-B510-190F26E2FF5A}"/>
+                <a16:creationId xmlns:a16="http://schemas.microsoft.com/office/drawing/2014/main" id="{692CB9A1-4BC1-4C79-B309-159BE3835732}"/>
               </a:ext>
             </a:extLst>
           </p:cNvPr>
@@ -2300,12 +2275,12 @@
   </p:cSld>
   <p:clrMap bg1="lt1" tx1="dk1" bg2="lt2" tx2="dk2" accent1="accent1" accent2="accent2" accent3="accent3" accent4="accent4" accent5="accent5" accent6="accent6" hlink="hlink" folHlink="folHlink"/>
   <p:sldLayoutIdLst>
-    <p:sldLayoutId xmlns:r="http://schemas.openxmlformats.org/officeDocument/2006/relationships" id="2147483649" r:id="Rd35cd1dbd9074c2c"/>
-    <p:sldLayoutId xmlns:r="http://schemas.openxmlformats.org/officeDocument/2006/relationships" id="2147483650" r:id="R34a2452cc0604838"/>
-    <p:sldLayoutId xmlns:r="http://schemas.openxmlformats.org/officeDocument/2006/relationships" id="2147483651" r:id="R35a82177c8ca4f51"/>
-    <p:sldLayoutId xmlns:r="http://schemas.openxmlformats.org/officeDocument/2006/relationships" id="2147483652" r:id="R358d96b762594b36"/>
-    <p:sldLayoutId xmlns:r="http://schemas.openxmlformats.org/officeDocument/2006/relationships" id="2147483653" r:id="R501ca4698be044bb"/>
-    <p:sldLayoutId xmlns:r="http://schemas.openxmlformats.org/officeDocument/2006/relationships" id="2147483654" r:id="R0078fa4ca3c2425e"/>
+    <p:sldLayoutId xmlns:r="http://schemas.openxmlformats.org/officeDocument/2006/relationships" id="2147483649" r:id="R00e6c2bfa788462d"/>
+    <p:sldLayoutId xmlns:r="http://schemas.openxmlformats.org/officeDocument/2006/relationships" id="2147483650" r:id="Re7254363931d4fe3"/>
+    <p:sldLayoutId xmlns:r="http://schemas.openxmlformats.org/officeDocument/2006/relationships" id="2147483651" r:id="R4a827faaf4e54914"/>
+    <p:sldLayoutId xmlns:r="http://schemas.openxmlformats.org/officeDocument/2006/relationships" id="2147483652" r:id="Ra196d0a982494a2f"/>
+    <p:sldLayoutId xmlns:r="http://schemas.openxmlformats.org/officeDocument/2006/relationships" id="2147483653" r:id="R0ccf07a5b4b34dfc"/>
+    <p:sldLayoutId xmlns:r="http://schemas.openxmlformats.org/officeDocument/2006/relationships" id="2147483654" r:id="Rebd54c81de8345f9"/>
   </p:sldLayoutIdLst>
   <p:txStyles>
     <p:titleStyle>
@@ -2838,7 +2813,7 @@
     <p:bg>
       <p:bgPr>
         <a:solidFill xmlns:a="http://schemas.openxmlformats.org/drawingml/2006/main">
-          <a:srgbClr val="FFFCF2"/>
+          <a:srgbClr val="FFFDF5"/>
         </a:solidFill>
       </p:bgPr>
     </p:bg>
@@ -2853,10 +2828,10 @@
       </p:grpSpPr>
       <p:sp>
         <p:nvSpPr>
-          <p:cNvPr id="8" name="">
+          <p:cNvPr id="19" name="">
             <a:extLst xmlns:a="http://schemas.openxmlformats.org/drawingml/2006/main">
               <a:ext uri="{FF2B5EF4-FFF2-40B4-BE49-F238E27FC236}">
-                <a16:creationId xmlns:a16="http://schemas.microsoft.com/office/drawing/2014/main" id="{A26CB669-7337-40C1-8FA3-3CEB23238538}"/>
+                <a16:creationId xmlns:a16="http://schemas.microsoft.com/office/drawing/2014/main" id="{4FF73E6A-4F94-46BD-A6B9-BF8627B7A2C1}"/>
               </a:ext>
             </a:extLst>
           </p:cNvPr>
@@ -2867,8 +2842,8 @@
         </p:nvSpPr>
         <p:spPr>
           <a:xfrm xmlns:a="http://schemas.openxmlformats.org/drawingml/2006/main">
-            <a:off x="609600" y="333375"/>
-            <a:ext cx="10972800" cy="714375"/>
+            <a:off x="609600" y="323850"/>
+            <a:ext cx="10972800" cy="666750"/>
           </a:xfrm>
           <a:prstGeom xmlns:a="http://schemas.openxmlformats.org/drawingml/2006/main" prst="rect">
             <a:avLst/>
@@ -2885,23 +2860,23 @@
           <a:lstStyle xmlns:a="http://schemas.openxmlformats.org/drawingml/2006/main"/>
           <a:p xmlns:a="http://schemas.openxmlformats.org/drawingml/2006/main">
             <a:pPr>
-              <a:defRPr sz="4050" b="1">
+              <a:defRPr sz="3450" b="1">
                 <a:solidFill>
-                  <a:srgbClr val="242720"/>
+                  <a:srgbClr val="263C3A"/>
                 </a:solidFill>
-                <a:latin typeface="Arial"/>
-                <a:ea typeface="Arial"/>
-                <a:cs typeface="Arial"/>
+                <a:latin typeface="DejaVu Sans"/>
+                <a:ea typeface="DejaVu Sans"/>
+                <a:cs typeface="DejaVu Sans"/>
               </a:defRPr>
             </a:pPr>
             <a:r>
-              <a:rPr sz="4050" b="1">
+              <a:rPr sz="3450" b="1">
                 <a:solidFill>
-                  <a:srgbClr val="242720"/>
+                  <a:srgbClr val="263C3A"/>
                 </a:solidFill>
-                <a:latin typeface="Arial"/>
-                <a:ea typeface="Arial"/>
-                <a:cs typeface="Arial"/>
+                <a:latin typeface="DejaVu Sans"/>
+                <a:ea typeface="DejaVu Sans"/>
+                <a:cs typeface="DejaVu Sans"/>
               </a:rPr>
               <a:t>Two things</a:t>
             </a:r>
@@ -2913,7 +2888,7 @@
           <p:cNvPr id="2" name="">
             <a:extLst xmlns:a="http://schemas.openxmlformats.org/drawingml/2006/main">
               <a:ext uri="{FF2B5EF4-FFF2-40B4-BE49-F238E27FC236}">
-                <a16:creationId xmlns:a16="http://schemas.microsoft.com/office/drawing/2014/main" id="{4A9999F9-B1F5-4946-A914-234F4037DE73}"/>
+                <a16:creationId xmlns:a16="http://schemas.microsoft.com/office/drawing/2014/main" id="{818B51DD-E7E5-47B7-A3A3-666E3F13F729}"/>
               </a:ext>
             </a:extLst>
           </p:cNvPr>
@@ -2924,8 +2899,8 @@
         </p:nvSpPr>
         <p:spPr>
           <a:xfrm xmlns:a="http://schemas.openxmlformats.org/drawingml/2006/main">
-            <a:off x="609600" y="1190625"/>
-            <a:ext cx="10972800" cy="476250"/>
+            <a:off x="609600" y="1085850"/>
+            <a:ext cx="10972800" cy="409575"/>
           </a:xfrm>
           <a:prstGeom xmlns:a="http://schemas.openxmlformats.org/drawingml/2006/main" prst="rect">
             <a:avLst/>
@@ -2942,25 +2917,25 @@
           <a:lstStyle xmlns:a="http://schemas.openxmlformats.org/drawingml/2006/main"/>
           <a:p xmlns:a="http://schemas.openxmlformats.org/drawingml/2006/main">
             <a:pPr>
-              <a:defRPr sz="2400" b="0">
+              <a:defRPr sz="2175" b="0">
                 <a:solidFill>
-                  <a:srgbClr val="242720"/>
+                  <a:srgbClr val="687572"/>
                 </a:solidFill>
-                <a:latin typeface="Arial"/>
-                <a:ea typeface="Arial"/>
-                <a:cs typeface="Arial"/>
+                <a:latin typeface="DejaVu Sans"/>
+                <a:ea typeface="DejaVu Sans"/>
+                <a:cs typeface="DejaVu Sans"/>
               </a:defRPr>
             </a:pPr>
             <a:r>
-              <a:rPr sz="2400" b="0">
+              <a:rPr sz="2175" b="0">
                 <a:solidFill>
-                  <a:srgbClr val="242720"/>
+                  <a:srgbClr val="687572"/>
                 </a:solidFill>
-                <a:latin typeface="Arial"/>
-                <a:ea typeface="Arial"/>
-                <a:cs typeface="Arial"/>
+                <a:latin typeface="DejaVu Sans"/>
+                <a:ea typeface="DejaVu Sans"/>
+                <a:cs typeface="DejaVu Sans"/>
               </a:rPr>
-              <a:t>[Add your topic or retrieval focus]</a:t>
+              <a:t>[Your topic or retrieval focus]</a:t>
             </a:r>
           </a:p>
         </p:txBody>
@@ -2970,7 +2945,7 @@
           <p:cNvPr id="3" name="">
             <a:extLst xmlns:a="http://schemas.openxmlformats.org/drawingml/2006/main">
               <a:ext uri="{FF2B5EF4-FFF2-40B4-BE49-F238E27FC236}">
-                <a16:creationId xmlns:a16="http://schemas.microsoft.com/office/drawing/2014/main" id="{55A9A429-4981-450A-8E27-185D252A05BC}"/>
+                <a16:creationId xmlns:a16="http://schemas.microsoft.com/office/drawing/2014/main" id="{58A49F72-7552-497D-AC48-241625641D24}"/>
               </a:ext>
             </a:extLst>
           </p:cNvPr>
@@ -2981,8 +2956,38 @@
         </p:nvSpPr>
         <p:spPr>
           <a:xfrm xmlns:a="http://schemas.openxmlformats.org/drawingml/2006/main">
-            <a:off x="609600" y="1733550"/>
-            <a:ext cx="10972800" cy="400050"/>
+            <a:off x="609600" y="1676400"/>
+            <a:ext cx="10972800" cy="19050"/>
+          </a:xfrm>
+          <a:prstGeom xmlns:a="http://schemas.openxmlformats.org/drawingml/2006/main" prst="rect">
+            <a:avLst/>
+          </a:prstGeom>
+          <a:solidFill xmlns:a="http://schemas.openxmlformats.org/drawingml/2006/main">
+            <a:srgbClr val="A9BDB7"/>
+          </a:solidFill>
+          <a:ln xmlns:a="http://schemas.openxmlformats.org/drawingml/2006/main" w="0">
+            <a:noFill/>
+          </a:ln>
+        </p:spPr>
+      </p:sp>
+      <p:sp>
+        <p:nvSpPr>
+          <p:cNvPr id="4" name="">
+            <a:extLst xmlns:a="http://schemas.openxmlformats.org/drawingml/2006/main">
+              <a:ext uri="{FF2B5EF4-FFF2-40B4-BE49-F238E27FC236}">
+                <a16:creationId xmlns:a16="http://schemas.microsoft.com/office/drawing/2014/main" id="{D1FA75A6-5728-42BD-A96C-6259DF4034DA}"/>
+              </a:ext>
+            </a:extLst>
+          </p:cNvPr>
+          <p:cNvSpPr>
+            <a:spLocks xmlns:a="http://schemas.openxmlformats.org/drawingml/2006/main" noGrp="1"/>
+          </p:cNvSpPr>
+          <p:nvPr/>
+        </p:nvSpPr>
+        <p:spPr>
+          <a:xfrm xmlns:a="http://schemas.openxmlformats.org/drawingml/2006/main">
+            <a:off x="609600" y="1828800"/>
+            <a:ext cx="4476750" cy="304800"/>
           </a:xfrm>
           <a:prstGeom xmlns:a="http://schemas.openxmlformats.org/drawingml/2006/main" prst="rect">
             <a:avLst/>
@@ -2999,35 +3004,35 @@
           <a:lstStyle xmlns:a="http://schemas.openxmlformats.org/drawingml/2006/main"/>
           <a:p xmlns:a="http://schemas.openxmlformats.org/drawingml/2006/main">
             <a:pPr>
-              <a:defRPr sz="1800" b="0">
+              <a:defRPr sz="1575" b="1">
                 <a:solidFill>
-                  <a:srgbClr val="28534A"/>
+                  <a:srgbClr val="263C3A"/>
                 </a:solidFill>
-                <a:latin typeface="Arial"/>
-                <a:ea typeface="Arial"/>
-                <a:cs typeface="Arial"/>
+                <a:latin typeface="DejaVu Sans"/>
+                <a:ea typeface="DejaVu Sans"/>
+                <a:cs typeface="DejaVu Sans"/>
               </a:defRPr>
             </a:pPr>
             <a:r>
-              <a:rPr sz="1800" b="0">
+              <a:rPr sz="1575" b="1">
                 <a:solidFill>
-                  <a:srgbClr val="28534A"/>
+                  <a:srgbClr val="263C3A"/>
                 </a:solidFill>
-                <a:latin typeface="Arial"/>
-                <a:ea typeface="Arial"/>
-                <a:cs typeface="Arial"/>
+                <a:latin typeface="DejaVu Sans"/>
+                <a:ea typeface="DejaVu Sans"/>
+                <a:cs typeface="DejaVu Sans"/>
               </a:rPr>
-              <a:t>Recall independently first. Check and improve after feedback.</a:t>
+              <a:t>01  Recall from memory</a:t>
             </a:r>
           </a:p>
         </p:txBody>
       </p:sp>
       <p:sp>
         <p:nvSpPr>
-          <p:cNvPr id="4" name="">
+          <p:cNvPr id="5" name="">
             <a:extLst xmlns:a="http://schemas.openxmlformats.org/drawingml/2006/main">
               <a:ext uri="{FF2B5EF4-FFF2-40B4-BE49-F238E27FC236}">
-                <a16:creationId xmlns:a16="http://schemas.microsoft.com/office/drawing/2014/main" id="{8ED81261-DDEC-4ED5-9832-E3F71A0A537E}"/>
+                <a16:creationId xmlns:a16="http://schemas.microsoft.com/office/drawing/2014/main" id="{E0C192F7-9AE0-4631-A264-228C6748A864}"/>
               </a:ext>
             </a:extLst>
           </p:cNvPr>
@@ -3038,172 +3043,8 @@
         </p:nvSpPr>
         <p:spPr>
           <a:xfrm xmlns:a="http://schemas.openxmlformats.org/drawingml/2006/main">
-            <a:off x="609600" y="2190750"/>
-            <a:ext cx="5400675" cy="3333750"/>
-          </a:xfrm>
-          <a:prstGeom xmlns:a="http://schemas.openxmlformats.org/drawingml/2006/main" prst="rect">
-            <a:avLst/>
-          </a:prstGeom>
-          <a:noFill xmlns:a="http://schemas.openxmlformats.org/drawingml/2006/main"/>
-          <a:ln xmlns:a="http://schemas.openxmlformats.org/drawingml/2006/main" w="9525">
-            <a:solidFill>
-              <a:srgbClr val="CBD0C4"/>
-            </a:solidFill>
-          </a:ln>
-        </p:spPr>
-        <p:txBody>
-          <a:bodyPr xmlns:a="http://schemas.openxmlformats.org/drawingml/2006/main" lIns="142875" tIns="114300" rIns="142875" bIns="0" anchor="t">
-            <a:noAutofit/>
-          </a:bodyPr>
-          <a:lstStyle xmlns:a="http://schemas.openxmlformats.org/drawingml/2006/main"/>
-          <a:p xmlns:a="http://schemas.openxmlformats.org/drawingml/2006/main">
-            <a:pPr>
-              <a:defRPr sz="1950" b="0">
-                <a:solidFill>
-                  <a:srgbClr val="42473D"/>
-                </a:solidFill>
-                <a:latin typeface="Arial"/>
-                <a:ea typeface="Arial"/>
-                <a:cs typeface="Arial"/>
-              </a:defRPr>
-            </a:pPr>
-            <a:r>
-              <a:rPr sz="1950" b="0">
-                <a:solidFill>
-                  <a:srgbClr val="42473D"/>
-                </a:solidFill>
-                <a:latin typeface="Arial"/>
-                <a:ea typeface="Arial"/>
-                <a:cs typeface="Arial"/>
-              </a:rPr>
-              <a:t>First thing</a:t>
-            </a:r>
-          </a:p>
-          <a:p xmlns:a="http://schemas.openxmlformats.org/drawingml/2006/main">
-            <a:pPr>
-              <a:defRPr sz="1950" b="0">
-                <a:solidFill>
-                  <a:srgbClr val="42473D"/>
-                </a:solidFill>
-                <a:latin typeface="Arial"/>
-                <a:ea typeface="Arial"/>
-                <a:cs typeface="Arial"/>
-              </a:defRPr>
-            </a:pPr>
-            <a:r>
-              <a:rPr sz="1950" b="0">
-                <a:solidFill>
-                  <a:srgbClr val="42473D"/>
-                </a:solidFill>
-                <a:latin typeface="Arial"/>
-                <a:ea typeface="Arial"/>
-                <a:cs typeface="Arial"/>
-              </a:rPr>
-              <a:t>[Add a focus]</a:t>
-            </a:r>
-          </a:p>
-        </p:txBody>
-      </p:sp>
-      <p:sp>
-        <p:nvSpPr>
-          <p:cNvPr id="5" name="">
-            <a:extLst xmlns:a="http://schemas.openxmlformats.org/drawingml/2006/main">
-              <a:ext uri="{FF2B5EF4-FFF2-40B4-BE49-F238E27FC236}">
-                <a16:creationId xmlns:a16="http://schemas.microsoft.com/office/drawing/2014/main" id="{8638E178-0B32-472D-AAE4-134C65128861}"/>
-              </a:ext>
-            </a:extLst>
-          </p:cNvPr>
-          <p:cNvSpPr>
-            <a:spLocks xmlns:a="http://schemas.openxmlformats.org/drawingml/2006/main" noGrp="1"/>
-          </p:cNvSpPr>
-          <p:nvPr/>
-        </p:nvSpPr>
-        <p:spPr>
-          <a:xfrm xmlns:a="http://schemas.openxmlformats.org/drawingml/2006/main">
-            <a:off x="6181725" y="2190750"/>
-            <a:ext cx="5400675" cy="3333750"/>
-          </a:xfrm>
-          <a:prstGeom xmlns:a="http://schemas.openxmlformats.org/drawingml/2006/main" prst="rect">
-            <a:avLst/>
-          </a:prstGeom>
-          <a:noFill xmlns:a="http://schemas.openxmlformats.org/drawingml/2006/main"/>
-          <a:ln xmlns:a="http://schemas.openxmlformats.org/drawingml/2006/main" w="9525">
-            <a:solidFill>
-              <a:srgbClr val="CBD0C4"/>
-            </a:solidFill>
-          </a:ln>
-        </p:spPr>
-        <p:txBody>
-          <a:bodyPr xmlns:a="http://schemas.openxmlformats.org/drawingml/2006/main" lIns="142875" tIns="114300" rIns="142875" bIns="0" anchor="t">
-            <a:noAutofit/>
-          </a:bodyPr>
-          <a:lstStyle xmlns:a="http://schemas.openxmlformats.org/drawingml/2006/main"/>
-          <a:p xmlns:a="http://schemas.openxmlformats.org/drawingml/2006/main">
-            <a:pPr>
-              <a:defRPr sz="1950" b="0">
-                <a:solidFill>
-                  <a:srgbClr val="42473D"/>
-                </a:solidFill>
-                <a:latin typeface="Arial"/>
-                <a:ea typeface="Arial"/>
-                <a:cs typeface="Arial"/>
-              </a:defRPr>
-            </a:pPr>
-            <a:r>
-              <a:rPr sz="1950" b="0">
-                <a:solidFill>
-                  <a:srgbClr val="42473D"/>
-                </a:solidFill>
-                <a:latin typeface="Arial"/>
-                <a:ea typeface="Arial"/>
-                <a:cs typeface="Arial"/>
-              </a:rPr>
-              <a:t>Second thing</a:t>
-            </a:r>
-          </a:p>
-          <a:p xmlns:a="http://schemas.openxmlformats.org/drawingml/2006/main">
-            <a:pPr>
-              <a:defRPr sz="1950" b="0">
-                <a:solidFill>
-                  <a:srgbClr val="42473D"/>
-                </a:solidFill>
-                <a:latin typeface="Arial"/>
-                <a:ea typeface="Arial"/>
-                <a:cs typeface="Arial"/>
-              </a:defRPr>
-            </a:pPr>
-            <a:r>
-              <a:rPr sz="1950" b="0">
-                <a:solidFill>
-                  <a:srgbClr val="42473D"/>
-                </a:solidFill>
-                <a:latin typeface="Arial"/>
-                <a:ea typeface="Arial"/>
-                <a:cs typeface="Arial"/>
-              </a:rPr>
-              <a:t>[Add a focus]</a:t>
-            </a:r>
-          </a:p>
-        </p:txBody>
-      </p:sp>
-      <p:sp>
-        <p:nvSpPr>
-          <p:cNvPr id="6" name="">
-            <a:extLst xmlns:a="http://schemas.openxmlformats.org/drawingml/2006/main">
-              <a:ext uri="{FF2B5EF4-FFF2-40B4-BE49-F238E27FC236}">
-                <a16:creationId xmlns:a16="http://schemas.microsoft.com/office/drawing/2014/main" id="{BEC58D45-FCE3-4CE2-8838-FD010D7F84E6}"/>
-              </a:ext>
-            </a:extLst>
-          </p:cNvPr>
-          <p:cNvSpPr>
-            <a:spLocks xmlns:a="http://schemas.openxmlformats.org/drawingml/2006/main" noGrp="1"/>
-          </p:cNvSpPr>
-          <p:nvPr/>
-        </p:nvSpPr>
-        <p:spPr>
-          <a:xfrm xmlns:a="http://schemas.openxmlformats.org/drawingml/2006/main">
-            <a:off x="609600" y="5953125"/>
-            <a:ext cx="10972800" cy="381000"/>
+            <a:off x="6286500" y="1828800"/>
+            <a:ext cx="5048250" cy="304800"/>
           </a:xfrm>
           <a:prstGeom xmlns:a="http://schemas.openxmlformats.org/drawingml/2006/main" prst="rect">
             <a:avLst/>
@@ -3220,35 +3061,35 @@
           <a:lstStyle xmlns:a="http://schemas.openxmlformats.org/drawingml/2006/main"/>
           <a:p xmlns:a="http://schemas.openxmlformats.org/drawingml/2006/main">
             <a:pPr>
-              <a:defRPr sz="1800" b="0">
+              <a:defRPr sz="1575" b="1">
                 <a:solidFill>
-                  <a:srgbClr val="28534A"/>
+                  <a:srgbClr val="263C3A"/>
                 </a:solidFill>
-                <a:latin typeface="Arial"/>
-                <a:ea typeface="Arial"/>
-                <a:cs typeface="Arial"/>
+                <a:latin typeface="DejaVu Sans"/>
+                <a:ea typeface="DejaVu Sans"/>
+                <a:cs typeface="DejaVu Sans"/>
               </a:defRPr>
             </a:pPr>
             <a:r>
-              <a:rPr sz="1800" b="0">
+              <a:rPr sz="1575" b="1">
                 <a:solidFill>
-                  <a:srgbClr val="28534A"/>
+                  <a:srgbClr val="263C3A"/>
                 </a:solidFill>
-                <a:latin typeface="Arial"/>
-                <a:ea typeface="Arial"/>
-                <a:cs typeface="Arial"/>
+                <a:latin typeface="DejaVu Sans"/>
+                <a:ea typeface="DejaVu Sans"/>
+                <a:cs typeface="DejaVu Sans"/>
               </a:rPr>
-              <a:t>Time: [Add minutes]     Check: [Add your feedback routine]</a:t>
+              <a:t>02  Check and improve</a:t>
             </a:r>
           </a:p>
         </p:txBody>
       </p:sp>
       <p:sp>
         <p:nvSpPr>
-          <p:cNvPr id="7" name="">
+          <p:cNvPr id="6" name="">
             <a:extLst xmlns:a="http://schemas.openxmlformats.org/drawingml/2006/main">
               <a:ext uri="{FF2B5EF4-FFF2-40B4-BE49-F238E27FC236}">
-                <a16:creationId xmlns:a16="http://schemas.microsoft.com/office/drawing/2014/main" id="{723D72A3-B7E7-4623-B22A-9CC4C7A0F0C0}"/>
+                <a16:creationId xmlns:a16="http://schemas.microsoft.com/office/drawing/2014/main" id="{97CAE170-3C14-4389-AF29-D693CF9C5BFD}"/>
               </a:ext>
             </a:extLst>
           </p:cNvPr>
@@ -3259,8 +3100,70 @@
         </p:nvSpPr>
         <p:spPr>
           <a:xfrm xmlns:a="http://schemas.openxmlformats.org/drawingml/2006/main">
-            <a:off x="609600" y="6534150"/>
-            <a:ext cx="10972800" cy="209550"/>
+            <a:off x="609600" y="2247900"/>
+            <a:ext cx="5400675" cy="3371850"/>
+          </a:xfrm>
+          <a:prstGeom xmlns:a="http://schemas.openxmlformats.org/drawingml/2006/main" prst="rect">
+            <a:avLst/>
+          </a:prstGeom>
+          <a:solidFill xmlns:a="http://schemas.openxmlformats.org/drawingml/2006/main">
+            <a:srgbClr val="EDF2F5"/>
+          </a:solidFill>
+          <a:ln xmlns:a="http://schemas.openxmlformats.org/drawingml/2006/main" w="9525">
+            <a:solidFill>
+              <a:srgbClr val="D4DFDB"/>
+            </a:solidFill>
+          </a:ln>
+        </p:spPr>
+      </p:sp>
+      <p:sp>
+        <p:nvSpPr>
+          <p:cNvPr id="7" name="">
+            <a:extLst xmlns:a="http://schemas.openxmlformats.org/drawingml/2006/main">
+              <a:ext uri="{FF2B5EF4-FFF2-40B4-BE49-F238E27FC236}">
+                <a16:creationId xmlns:a16="http://schemas.microsoft.com/office/drawing/2014/main" id="{405F51B9-6580-4036-8C99-8CDC31F30567}"/>
+              </a:ext>
+            </a:extLst>
+          </p:cNvPr>
+          <p:cNvSpPr>
+            <a:spLocks xmlns:a="http://schemas.openxmlformats.org/drawingml/2006/main" noGrp="1"/>
+          </p:cNvSpPr>
+          <p:nvPr/>
+        </p:nvSpPr>
+        <p:spPr>
+          <a:xfrm xmlns:a="http://schemas.openxmlformats.org/drawingml/2006/main">
+            <a:off x="800100" y="2419350"/>
+            <a:ext cx="381000" cy="381000"/>
+          </a:xfrm>
+          <a:prstGeom xmlns:a="http://schemas.openxmlformats.org/drawingml/2006/main" prst="ellipse">
+            <a:avLst/>
+          </a:prstGeom>
+          <a:solidFill xmlns:a="http://schemas.openxmlformats.org/drawingml/2006/main">
+            <a:srgbClr val="FFFFFF"/>
+          </a:solidFill>
+          <a:ln xmlns:a="http://schemas.openxmlformats.org/drawingml/2006/main" w="0">
+            <a:noFill/>
+          </a:ln>
+        </p:spPr>
+      </p:sp>
+      <p:sp>
+        <p:nvSpPr>
+          <p:cNvPr id="8" name="">
+            <a:extLst xmlns:a="http://schemas.openxmlformats.org/drawingml/2006/main">
+              <a:ext uri="{FF2B5EF4-FFF2-40B4-BE49-F238E27FC236}">
+                <a16:creationId xmlns:a16="http://schemas.microsoft.com/office/drawing/2014/main" id="{C40831B6-7177-401D-8B33-4E039EE2A08C}"/>
+              </a:ext>
+            </a:extLst>
+          </p:cNvPr>
+          <p:cNvSpPr>
+            <a:spLocks xmlns:a="http://schemas.openxmlformats.org/drawingml/2006/main" noGrp="1"/>
+          </p:cNvSpPr>
+          <p:nvPr/>
+        </p:nvSpPr>
+        <p:spPr>
+          <a:xfrm xmlns:a="http://schemas.openxmlformats.org/drawingml/2006/main">
+            <a:off x="857250" y="2486025"/>
+            <a:ext cx="342900" cy="285750"/>
           </a:xfrm>
           <a:prstGeom xmlns:a="http://schemas.openxmlformats.org/drawingml/2006/main" prst="rect">
             <a:avLst/>
@@ -3277,33 +3180,524 @@
           <a:lstStyle xmlns:a="http://schemas.openxmlformats.org/drawingml/2006/main"/>
           <a:p xmlns:a="http://schemas.openxmlformats.org/drawingml/2006/main">
             <a:pPr>
-              <a:defRPr sz="1050" b="0">
+              <a:defRPr sz="1350" b="1">
                 <a:solidFill>
-                  <a:srgbClr val="62675C"/>
+                  <a:srgbClr val="263C3A"/>
                 </a:solidFill>
-                <a:latin typeface="Arial"/>
-                <a:ea typeface="Arial"/>
-                <a:cs typeface="Arial"/>
+                <a:latin typeface="DejaVu Sans"/>
+                <a:ea typeface="DejaVu Sans"/>
+                <a:cs typeface="DejaVu Sans"/>
               </a:defRPr>
             </a:pPr>
             <a:r>
-              <a:rPr sz="1050" b="0">
+              <a:rPr sz="1350" b="1">
                 <a:solidFill>
-                  <a:srgbClr val="62675C"/>
+                  <a:srgbClr val="263C3A"/>
                 </a:solidFill>
-                <a:latin typeface="Arial"/>
-                <a:ea typeface="Arial"/>
-                <a:cs typeface="Arial"/>
+                <a:latin typeface="DejaVu Sans"/>
+                <a:ea typeface="DejaVu Sans"/>
+                <a:cs typeface="DejaVu Sans"/>
               </a:rPr>
-              <a:t>TNT Teaching Tools   Editable classroom template   Source and teacher guidance in speaker notes</a:t>
+              <a:t>01</a:t>
             </a:r>
           </a:p>
         </p:txBody>
       </p:sp>
+      <p:sp>
+        <p:nvSpPr>
+          <p:cNvPr id="9" name="">
+            <a:extLst xmlns:a="http://schemas.openxmlformats.org/drawingml/2006/main">
+              <a:ext uri="{FF2B5EF4-FFF2-40B4-BE49-F238E27FC236}">
+                <a16:creationId xmlns:a16="http://schemas.microsoft.com/office/drawing/2014/main" id="{F8DC1717-379C-4B48-9CA7-82C96232CCAB}"/>
+              </a:ext>
+            </a:extLst>
+          </p:cNvPr>
+          <p:cNvSpPr>
+            <a:spLocks xmlns:a="http://schemas.openxmlformats.org/drawingml/2006/main" noGrp="1"/>
+          </p:cNvSpPr>
+          <p:nvPr/>
+        </p:nvSpPr>
+        <p:spPr>
+          <a:xfrm xmlns:a="http://schemas.openxmlformats.org/drawingml/2006/main">
+            <a:off x="1352550" y="2466975"/>
+            <a:ext cx="4467225" cy="428625"/>
+          </a:xfrm>
+          <a:prstGeom xmlns:a="http://schemas.openxmlformats.org/drawingml/2006/main" prst="rect">
+            <a:avLst/>
+          </a:prstGeom>
+          <a:noFill xmlns:a="http://schemas.openxmlformats.org/drawingml/2006/main"/>
+          <a:ln xmlns:a="http://schemas.openxmlformats.org/drawingml/2006/main" w="0">
+            <a:noFill/>
+          </a:ln>
+        </p:spPr>
+        <p:txBody>
+          <a:bodyPr xmlns:a="http://schemas.openxmlformats.org/drawingml/2006/main" lIns="0" tIns="0" rIns="0" bIns="0" anchor="t">
+            <a:noAutofit/>
+          </a:bodyPr>
+          <a:lstStyle xmlns:a="http://schemas.openxmlformats.org/drawingml/2006/main"/>
+          <a:p xmlns:a="http://schemas.openxmlformats.org/drawingml/2006/main">
+            <a:pPr>
+              <a:defRPr sz="1725" b="1">
+                <a:solidFill>
+                  <a:srgbClr val="263C3A"/>
+                </a:solidFill>
+                <a:latin typeface="DejaVu Sans"/>
+                <a:ea typeface="DejaVu Sans"/>
+                <a:cs typeface="DejaVu Sans"/>
+              </a:defRPr>
+            </a:pPr>
+            <a:r>
+              <a:rPr sz="1725" b="1">
+                <a:solidFill>
+                  <a:srgbClr val="263C3A"/>
+                </a:solidFill>
+                <a:latin typeface="DejaVu Sans"/>
+                <a:ea typeface="DejaVu Sans"/>
+                <a:cs typeface="DejaVu Sans"/>
+              </a:rPr>
+              <a:t>First thing I remember</a:t>
+            </a:r>
+          </a:p>
+        </p:txBody>
+      </p:sp>
+      <p:sp>
+        <p:nvSpPr>
+          <p:cNvPr id="10" name="">
+            <a:extLst xmlns:a="http://schemas.openxmlformats.org/drawingml/2006/main">
+              <a:ext uri="{FF2B5EF4-FFF2-40B4-BE49-F238E27FC236}">
+                <a16:creationId xmlns:a16="http://schemas.microsoft.com/office/drawing/2014/main" id="{828ABCE8-7605-4B81-BE8F-24802DB5DA6F}"/>
+              </a:ext>
+            </a:extLst>
+          </p:cNvPr>
+          <p:cNvSpPr>
+            <a:spLocks xmlns:a="http://schemas.openxmlformats.org/drawingml/2006/main" noGrp="1"/>
+          </p:cNvSpPr>
+          <p:nvPr/>
+        </p:nvSpPr>
+        <p:spPr>
+          <a:xfrm xmlns:a="http://schemas.openxmlformats.org/drawingml/2006/main">
+            <a:off x="819150" y="2990850"/>
+            <a:ext cx="4981575" cy="2466975"/>
+          </a:xfrm>
+          <a:prstGeom xmlns:a="http://schemas.openxmlformats.org/drawingml/2006/main" prst="rect">
+            <a:avLst/>
+          </a:prstGeom>
+          <a:noFill xmlns:a="http://schemas.openxmlformats.org/drawingml/2006/main"/>
+          <a:ln xmlns:a="http://schemas.openxmlformats.org/drawingml/2006/main" w="0">
+            <a:noFill/>
+          </a:ln>
+        </p:spPr>
+        <p:txBody>
+          <a:bodyPr xmlns:a="http://schemas.openxmlformats.org/drawingml/2006/main" lIns="0" tIns="0" rIns="0" bIns="0" anchor="t">
+            <a:noAutofit/>
+          </a:bodyPr>
+          <a:lstStyle xmlns:a="http://schemas.openxmlformats.org/drawingml/2006/main"/>
+          <a:p xmlns:a="http://schemas.openxmlformats.org/drawingml/2006/main">
+            <a:pPr>
+              <a:defRPr sz="1950" b="0">
+                <a:solidFill>
+                  <a:srgbClr val="687572"/>
+                </a:solidFill>
+                <a:latin typeface="DejaVu Sans"/>
+                <a:ea typeface="DejaVu Sans"/>
+                <a:cs typeface="DejaVu Sans"/>
+              </a:defRPr>
+            </a:pPr>
+            <a:r>
+              <a:rPr sz="1950" b="0">
+                <a:solidFill>
+                  <a:srgbClr val="687572"/>
+                </a:solidFill>
+                <a:latin typeface="DejaVu Sans"/>
+                <a:ea typeface="DejaVu Sans"/>
+                <a:cs typeface="DejaVu Sans"/>
+              </a:rPr>
+              <a:t>[Your focus]</a:t>
+            </a:r>
+          </a:p>
+        </p:txBody>
+      </p:sp>
+      <p:sp>
+        <p:nvSpPr>
+          <p:cNvPr id="11" name="">
+            <a:extLst xmlns:a="http://schemas.openxmlformats.org/drawingml/2006/main">
+              <a:ext uri="{FF2B5EF4-FFF2-40B4-BE49-F238E27FC236}">
+                <a16:creationId xmlns:a16="http://schemas.microsoft.com/office/drawing/2014/main" id="{31F5A1D2-8068-4CDD-8133-D18BC7A14348}"/>
+              </a:ext>
+            </a:extLst>
+          </p:cNvPr>
+          <p:cNvSpPr>
+            <a:spLocks xmlns:a="http://schemas.openxmlformats.org/drawingml/2006/main" noGrp="1"/>
+          </p:cNvSpPr>
+          <p:nvPr/>
+        </p:nvSpPr>
+        <p:spPr>
+          <a:xfrm xmlns:a="http://schemas.openxmlformats.org/drawingml/2006/main">
+            <a:off x="6181725" y="2247900"/>
+            <a:ext cx="5400675" cy="3371850"/>
+          </a:xfrm>
+          <a:prstGeom xmlns:a="http://schemas.openxmlformats.org/drawingml/2006/main" prst="rect">
+            <a:avLst/>
+          </a:prstGeom>
+          <a:solidFill xmlns:a="http://schemas.openxmlformats.org/drawingml/2006/main">
+            <a:srgbClr val="EAF1EC"/>
+          </a:solidFill>
+          <a:ln xmlns:a="http://schemas.openxmlformats.org/drawingml/2006/main" w="9525">
+            <a:solidFill>
+              <a:srgbClr val="D4DFDB"/>
+            </a:solidFill>
+          </a:ln>
+        </p:spPr>
+      </p:sp>
+      <p:sp>
+        <p:nvSpPr>
+          <p:cNvPr id="12" name="">
+            <a:extLst xmlns:a="http://schemas.openxmlformats.org/drawingml/2006/main">
+              <a:ext uri="{FF2B5EF4-FFF2-40B4-BE49-F238E27FC236}">
+                <a16:creationId xmlns:a16="http://schemas.microsoft.com/office/drawing/2014/main" id="{6F3D95A2-CF88-4CC8-8364-71681E08F60F}"/>
+              </a:ext>
+            </a:extLst>
+          </p:cNvPr>
+          <p:cNvSpPr>
+            <a:spLocks xmlns:a="http://schemas.openxmlformats.org/drawingml/2006/main" noGrp="1"/>
+          </p:cNvSpPr>
+          <p:nvPr/>
+        </p:nvSpPr>
+        <p:spPr>
+          <a:xfrm xmlns:a="http://schemas.openxmlformats.org/drawingml/2006/main">
+            <a:off x="6372225" y="2419350"/>
+            <a:ext cx="381000" cy="381000"/>
+          </a:xfrm>
+          <a:prstGeom xmlns:a="http://schemas.openxmlformats.org/drawingml/2006/main" prst="ellipse">
+            <a:avLst/>
+          </a:prstGeom>
+          <a:solidFill xmlns:a="http://schemas.openxmlformats.org/drawingml/2006/main">
+            <a:srgbClr val="FFFFFF"/>
+          </a:solidFill>
+          <a:ln xmlns:a="http://schemas.openxmlformats.org/drawingml/2006/main" w="0">
+            <a:noFill/>
+          </a:ln>
+        </p:spPr>
+      </p:sp>
+      <p:sp>
+        <p:nvSpPr>
+          <p:cNvPr id="13" name="">
+            <a:extLst xmlns:a="http://schemas.openxmlformats.org/drawingml/2006/main">
+              <a:ext uri="{FF2B5EF4-FFF2-40B4-BE49-F238E27FC236}">
+                <a16:creationId xmlns:a16="http://schemas.microsoft.com/office/drawing/2014/main" id="{A3B35568-5E5D-467D-9186-DACDAFCDD98B}"/>
+              </a:ext>
+            </a:extLst>
+          </p:cNvPr>
+          <p:cNvSpPr>
+            <a:spLocks xmlns:a="http://schemas.openxmlformats.org/drawingml/2006/main" noGrp="1"/>
+          </p:cNvSpPr>
+          <p:nvPr/>
+        </p:nvSpPr>
+        <p:spPr>
+          <a:xfrm xmlns:a="http://schemas.openxmlformats.org/drawingml/2006/main">
+            <a:off x="6429375" y="2486025"/>
+            <a:ext cx="342900" cy="285750"/>
+          </a:xfrm>
+          <a:prstGeom xmlns:a="http://schemas.openxmlformats.org/drawingml/2006/main" prst="rect">
+            <a:avLst/>
+          </a:prstGeom>
+          <a:noFill xmlns:a="http://schemas.openxmlformats.org/drawingml/2006/main"/>
+          <a:ln xmlns:a="http://schemas.openxmlformats.org/drawingml/2006/main" w="0">
+            <a:noFill/>
+          </a:ln>
+        </p:spPr>
+        <p:txBody>
+          <a:bodyPr xmlns:a="http://schemas.openxmlformats.org/drawingml/2006/main" lIns="0" tIns="0" rIns="0" bIns="0" anchor="t">
+            <a:noAutofit/>
+          </a:bodyPr>
+          <a:lstStyle xmlns:a="http://schemas.openxmlformats.org/drawingml/2006/main"/>
+          <a:p xmlns:a="http://schemas.openxmlformats.org/drawingml/2006/main">
+            <a:pPr>
+              <a:defRPr sz="1350" b="1">
+                <a:solidFill>
+                  <a:srgbClr val="263C3A"/>
+                </a:solidFill>
+                <a:latin typeface="DejaVu Sans"/>
+                <a:ea typeface="DejaVu Sans"/>
+                <a:cs typeface="DejaVu Sans"/>
+              </a:defRPr>
+            </a:pPr>
+            <a:r>
+              <a:rPr sz="1350" b="1">
+                <a:solidFill>
+                  <a:srgbClr val="263C3A"/>
+                </a:solidFill>
+                <a:latin typeface="DejaVu Sans"/>
+                <a:ea typeface="DejaVu Sans"/>
+                <a:cs typeface="DejaVu Sans"/>
+              </a:rPr>
+              <a:t>02</a:t>
+            </a:r>
+          </a:p>
+        </p:txBody>
+      </p:sp>
+      <p:sp>
+        <p:nvSpPr>
+          <p:cNvPr id="14" name="">
+            <a:extLst xmlns:a="http://schemas.openxmlformats.org/drawingml/2006/main">
+              <a:ext uri="{FF2B5EF4-FFF2-40B4-BE49-F238E27FC236}">
+                <a16:creationId xmlns:a16="http://schemas.microsoft.com/office/drawing/2014/main" id="{855FA72B-150F-40A1-AEF3-798487BA8112}"/>
+              </a:ext>
+            </a:extLst>
+          </p:cNvPr>
+          <p:cNvSpPr>
+            <a:spLocks xmlns:a="http://schemas.openxmlformats.org/drawingml/2006/main" noGrp="1"/>
+          </p:cNvSpPr>
+          <p:nvPr/>
+        </p:nvSpPr>
+        <p:spPr>
+          <a:xfrm xmlns:a="http://schemas.openxmlformats.org/drawingml/2006/main">
+            <a:off x="6924675" y="2466975"/>
+            <a:ext cx="4467225" cy="428625"/>
+          </a:xfrm>
+          <a:prstGeom xmlns:a="http://schemas.openxmlformats.org/drawingml/2006/main" prst="rect">
+            <a:avLst/>
+          </a:prstGeom>
+          <a:noFill xmlns:a="http://schemas.openxmlformats.org/drawingml/2006/main"/>
+          <a:ln xmlns:a="http://schemas.openxmlformats.org/drawingml/2006/main" w="0">
+            <a:noFill/>
+          </a:ln>
+        </p:spPr>
+        <p:txBody>
+          <a:bodyPr xmlns:a="http://schemas.openxmlformats.org/drawingml/2006/main" lIns="0" tIns="0" rIns="0" bIns="0" anchor="t">
+            <a:noAutofit/>
+          </a:bodyPr>
+          <a:lstStyle xmlns:a="http://schemas.openxmlformats.org/drawingml/2006/main"/>
+          <a:p xmlns:a="http://schemas.openxmlformats.org/drawingml/2006/main">
+            <a:pPr>
+              <a:defRPr sz="1725" b="1">
+                <a:solidFill>
+                  <a:srgbClr val="263C3A"/>
+                </a:solidFill>
+                <a:latin typeface="DejaVu Sans"/>
+                <a:ea typeface="DejaVu Sans"/>
+                <a:cs typeface="DejaVu Sans"/>
+              </a:defRPr>
+            </a:pPr>
+            <a:r>
+              <a:rPr sz="1725" b="1">
+                <a:solidFill>
+                  <a:srgbClr val="263C3A"/>
+                </a:solidFill>
+                <a:latin typeface="DejaVu Sans"/>
+                <a:ea typeface="DejaVu Sans"/>
+                <a:cs typeface="DejaVu Sans"/>
+              </a:rPr>
+              <a:t>Second thing I remember</a:t>
+            </a:r>
+          </a:p>
+        </p:txBody>
+      </p:sp>
+      <p:sp>
+        <p:nvSpPr>
+          <p:cNvPr id="15" name="">
+            <a:extLst xmlns:a="http://schemas.openxmlformats.org/drawingml/2006/main">
+              <a:ext uri="{FF2B5EF4-FFF2-40B4-BE49-F238E27FC236}">
+                <a16:creationId xmlns:a16="http://schemas.microsoft.com/office/drawing/2014/main" id="{360259B6-A5D2-438F-A857-905A0BFE500C}"/>
+              </a:ext>
+            </a:extLst>
+          </p:cNvPr>
+          <p:cNvSpPr>
+            <a:spLocks xmlns:a="http://schemas.openxmlformats.org/drawingml/2006/main" noGrp="1"/>
+          </p:cNvSpPr>
+          <p:nvPr/>
+        </p:nvSpPr>
+        <p:spPr>
+          <a:xfrm xmlns:a="http://schemas.openxmlformats.org/drawingml/2006/main">
+            <a:off x="6391275" y="2990850"/>
+            <a:ext cx="4981575" cy="2466975"/>
+          </a:xfrm>
+          <a:prstGeom xmlns:a="http://schemas.openxmlformats.org/drawingml/2006/main" prst="rect">
+            <a:avLst/>
+          </a:prstGeom>
+          <a:noFill xmlns:a="http://schemas.openxmlformats.org/drawingml/2006/main"/>
+          <a:ln xmlns:a="http://schemas.openxmlformats.org/drawingml/2006/main" w="0">
+            <a:noFill/>
+          </a:ln>
+        </p:spPr>
+        <p:txBody>
+          <a:bodyPr xmlns:a="http://schemas.openxmlformats.org/drawingml/2006/main" lIns="0" tIns="0" rIns="0" bIns="0" anchor="t">
+            <a:noAutofit/>
+          </a:bodyPr>
+          <a:lstStyle xmlns:a="http://schemas.openxmlformats.org/drawingml/2006/main"/>
+          <a:p xmlns:a="http://schemas.openxmlformats.org/drawingml/2006/main">
+            <a:pPr>
+              <a:defRPr sz="1950" b="0">
+                <a:solidFill>
+                  <a:srgbClr val="687572"/>
+                </a:solidFill>
+                <a:latin typeface="DejaVu Sans"/>
+                <a:ea typeface="DejaVu Sans"/>
+                <a:cs typeface="DejaVu Sans"/>
+              </a:defRPr>
+            </a:pPr>
+            <a:r>
+              <a:rPr sz="1950" b="0">
+                <a:solidFill>
+                  <a:srgbClr val="687572"/>
+                </a:solidFill>
+                <a:latin typeface="DejaVu Sans"/>
+                <a:ea typeface="DejaVu Sans"/>
+                <a:cs typeface="DejaVu Sans"/>
+              </a:rPr>
+              <a:t>[Your focus]</a:t>
+            </a:r>
+          </a:p>
+        </p:txBody>
+      </p:sp>
+      <p:sp>
+        <p:nvSpPr>
+          <p:cNvPr id="16" name="">
+            <a:extLst xmlns:a="http://schemas.openxmlformats.org/drawingml/2006/main">
+              <a:ext uri="{FF2B5EF4-FFF2-40B4-BE49-F238E27FC236}">
+                <a16:creationId xmlns:a16="http://schemas.microsoft.com/office/drawing/2014/main" id="{D41455B3-0CC7-443E-A93C-0E9B00C16644}"/>
+              </a:ext>
+            </a:extLst>
+          </p:cNvPr>
+          <p:cNvSpPr>
+            <a:spLocks xmlns:a="http://schemas.openxmlformats.org/drawingml/2006/main" noGrp="1"/>
+          </p:cNvSpPr>
+          <p:nvPr/>
+        </p:nvSpPr>
+        <p:spPr>
+          <a:xfrm xmlns:a="http://schemas.openxmlformats.org/drawingml/2006/main">
+            <a:off x="609600" y="5953125"/>
+            <a:ext cx="10972800" cy="9525"/>
+          </a:xfrm>
+          <a:prstGeom xmlns:a="http://schemas.openxmlformats.org/drawingml/2006/main" prst="rect">
+            <a:avLst/>
+          </a:prstGeom>
+          <a:solidFill xmlns:a="http://schemas.openxmlformats.org/drawingml/2006/main">
+            <a:srgbClr val="A9BDB7"/>
+          </a:solidFill>
+          <a:ln xmlns:a="http://schemas.openxmlformats.org/drawingml/2006/main" w="0">
+            <a:noFill/>
+          </a:ln>
+        </p:spPr>
+      </p:sp>
+      <p:sp>
+        <p:nvSpPr>
+          <p:cNvPr id="17" name="">
+            <a:extLst xmlns:a="http://schemas.openxmlformats.org/drawingml/2006/main">
+              <a:ext uri="{FF2B5EF4-FFF2-40B4-BE49-F238E27FC236}">
+                <a16:creationId xmlns:a16="http://schemas.microsoft.com/office/drawing/2014/main" id="{7D5675B6-BDB2-4424-AD12-F04B8548F6E3}"/>
+              </a:ext>
+            </a:extLst>
+          </p:cNvPr>
+          <p:cNvSpPr>
+            <a:spLocks xmlns:a="http://schemas.openxmlformats.org/drawingml/2006/main" noGrp="1"/>
+          </p:cNvSpPr>
+          <p:nvPr/>
+        </p:nvSpPr>
+        <p:spPr>
+          <a:xfrm xmlns:a="http://schemas.openxmlformats.org/drawingml/2006/main">
+            <a:off x="609600" y="6191250"/>
+            <a:ext cx="3238500" cy="361950"/>
+          </a:xfrm>
+          <a:prstGeom xmlns:a="http://schemas.openxmlformats.org/drawingml/2006/main" prst="rect">
+            <a:avLst/>
+          </a:prstGeom>
+          <a:noFill xmlns:a="http://schemas.openxmlformats.org/drawingml/2006/main"/>
+          <a:ln xmlns:a="http://schemas.openxmlformats.org/drawingml/2006/main" w="0">
+            <a:noFill/>
+          </a:ln>
+        </p:spPr>
+        <p:txBody>
+          <a:bodyPr xmlns:a="http://schemas.openxmlformats.org/drawingml/2006/main" lIns="0" tIns="0" rIns="0" bIns="0" anchor="t">
+            <a:noAutofit/>
+          </a:bodyPr>
+          <a:lstStyle xmlns:a="http://schemas.openxmlformats.org/drawingml/2006/main"/>
+          <a:p xmlns:a="http://schemas.openxmlformats.org/drawingml/2006/main">
+            <a:pPr>
+              <a:defRPr sz="1650" b="0">
+                <a:solidFill>
+                  <a:srgbClr val="687572"/>
+                </a:solidFill>
+                <a:latin typeface="DejaVu Sans"/>
+                <a:ea typeface="DejaVu Sans"/>
+                <a:cs typeface="DejaVu Sans"/>
+              </a:defRPr>
+            </a:pPr>
+            <a:r>
+              <a:rPr sz="1650" b="0">
+                <a:solidFill>
+                  <a:srgbClr val="687572"/>
+                </a:solidFill>
+                <a:latin typeface="DejaVu Sans"/>
+                <a:ea typeface="DejaVu Sans"/>
+                <a:cs typeface="DejaVu Sans"/>
+              </a:rPr>
+              <a:t>Time: [Minutes]</a:t>
+            </a:r>
+          </a:p>
+        </p:txBody>
+      </p:sp>
+      <p:sp>
+        <p:nvSpPr>
+          <p:cNvPr id="18" name="">
+            <a:extLst xmlns:a="http://schemas.openxmlformats.org/drawingml/2006/main">
+              <a:ext uri="{FF2B5EF4-FFF2-40B4-BE49-F238E27FC236}">
+                <a16:creationId xmlns:a16="http://schemas.microsoft.com/office/drawing/2014/main" id="{59C3952D-D2D4-4ADA-9929-51231279D7EE}"/>
+              </a:ext>
+            </a:extLst>
+          </p:cNvPr>
+          <p:cNvSpPr>
+            <a:spLocks xmlns:a="http://schemas.openxmlformats.org/drawingml/2006/main" noGrp="1"/>
+          </p:cNvSpPr>
+          <p:nvPr/>
+        </p:nvSpPr>
+        <p:spPr>
+          <a:xfrm xmlns:a="http://schemas.openxmlformats.org/drawingml/2006/main">
+            <a:off x="4286250" y="6191250"/>
+            <a:ext cx="7296150" cy="361950"/>
+          </a:xfrm>
+          <a:prstGeom xmlns:a="http://schemas.openxmlformats.org/drawingml/2006/main" prst="rect">
+            <a:avLst/>
+          </a:prstGeom>
+          <a:noFill xmlns:a="http://schemas.openxmlformats.org/drawingml/2006/main"/>
+          <a:ln xmlns:a="http://schemas.openxmlformats.org/drawingml/2006/main" w="0">
+            <a:noFill/>
+          </a:ln>
+        </p:spPr>
+        <p:txBody>
+          <a:bodyPr xmlns:a="http://schemas.openxmlformats.org/drawingml/2006/main" lIns="0" tIns="0" rIns="0" bIns="0" anchor="t">
+            <a:noAutofit/>
+          </a:bodyPr>
+          <a:lstStyle xmlns:a="http://schemas.openxmlformats.org/drawingml/2006/main"/>
+          <a:p xmlns:a="http://schemas.openxmlformats.org/drawingml/2006/main">
+            <a:pPr>
+              <a:defRPr sz="1650" b="0">
+                <a:solidFill>
+                  <a:srgbClr val="687572"/>
+                </a:solidFill>
+                <a:latin typeface="DejaVu Sans"/>
+                <a:ea typeface="DejaVu Sans"/>
+                <a:cs typeface="DejaVu Sans"/>
+              </a:defRPr>
+            </a:pPr>
+            <a:r>
+              <a:rPr sz="1650" b="0">
+                <a:solidFill>
+                  <a:srgbClr val="687572"/>
+                </a:solidFill>
+                <a:latin typeface="DejaVu Sans"/>
+                <a:ea typeface="DejaVu Sans"/>
+                <a:cs typeface="DejaVu Sans"/>
+              </a:rPr>
+              <a:t>Feedback: [Your checking routine]</a:t>
+            </a:r>
+          </a:p>
+        </p:txBody>
+      </p:sp>
     </p:spTree>
     <p:extLst>
       <p:ext uri="{BB962C8B-B14F-4D97-AF65-F5344CB8AC3E}">
-        <p14:creationId xmlns:p14="http://schemas.microsoft.com/office/powerpoint/2010/main" val="809284030"/>
+        <p14:creationId xmlns:p14="http://schemas.microsoft.com/office/powerpoint/2010/main" val="223387409"/>
       </p:ext>
     </p:extLst>
   </p:cSld>
